--- a/docs/DaoTao/Buoi06_ThemBaoCao.pptx
+++ b/docs/DaoTao/Buoi06_ThemBaoCao.pptx
@@ -709,17 +709,17 @@
           <a:lstStyle/>
           <a:p>
             <a:r>
-              <a:t>Một báo cáo gồm: trang Main có FilterMode="true"; Filter là form điều kiện, command Processing gọi procedure; procedure rs_... ở App Data trả bảng kết quả; Grid khai các cột kết quả với độ rộng, định dạng, aggregate="Sum" để cộng tổng; Report khai danh sách mẫu in / xuất.</a:t>
-            </a:r>
-          </a:p>
-          <a:p>
-            <a:r>
-              <a:t>Trong Report, reportFile trỏ tới Templates\Rpt (Crystal Report), templateFile trỏ tới Templates\Excel (Excel) — không ghi đuôi file. Ví dụ thật ở Report\APTran.xml: APTran_01 là file .rpt, APTran là file .xlsx; có thêm bản BI (song ngữ), FC (ngoại tệ), _a.</a:t>
-            </a:r>
-          </a:p>
-          <a:p>
-            <a:r>
-              <a:t>Trong command Processing, macro @@language, @@userID, @@admin được Fast thay giá trị trước khi chạy.</a:t>
+              <a:t>Một báo cáo gồm: trang Main có FilterMode="true"; Filter là form điều kiện, trong đó command Processing gọi procedure; procedure rs_... nằm ở App Data, trả về bảng kết quả; Grid khai báo các cột kết quả với độ rộng, định dạng, và aggregate="Sum" để cộng tổng; Report khai báo danh sách mẫu in / mẫu xuất.</a:t>
+            </a:r>
+          </a:p>
+          <a:p>
+            <a:r>
+              <a:t>Trong Report, reportFile trỏ tới thư mục Templates\Rpt (Crystal Report), templateFile trỏ tới Templates\Excel (Excel) — chỉ ghi tên, không ghi đuôi file. Ví dụ thật ở Report\APTran.xml: APTran_01 là file .rpt, APTran là file .xlsx; ngoài ra còn các bản BI (song ngữ), FC (ngoại tệ), _a (bản phụ).</a:t>
+            </a:r>
+          </a:p>
+          <a:p>
+            <a:r>
+              <a:t>Trong command Processing, các macro @@language, @@userID, @@admin được Fast thay bằng giá trị thật trước khi chạy.</a:t>
             </a:r>
           </a:p>
         </p:txBody>
@@ -789,42 +789,42 @@
           <a:lstStyle/>
           <a:p>
             <a:r>
-              <a:t>Khung procedure báo cáo của Fast khá cố định. Bcode có sẵn khung: gõ rsrepq trong SQL Query.</a:t>
-            </a:r>
-          </a:p>
-          <a:p>
-            <a:r>
-              <a:t>GetUnitFilter dựng điều kiện lọc đơn vị theo quyền user.</a:t>
-            </a:r>
-          </a:p>
-          <a:p>
-            <a:r>
-              <a:t>SELECT TOP 0 ... INTO #report tạo bảng tạm đúng kiểu cột.</a:t>
-            </a:r>
-          </a:p>
-          <a:p>
-            <a:r>
-              <a:t>@Key là chuỗi điều kiện; GetCheckKey kiểm tra / chuẩn hoá chuỗi trước khi chạy.</a:t>
-            </a:r>
-          </a:p>
-          <a:p>
-            <a:r>
-              <a:t>Partition$Execute chạy câu @q trên mọi bảng kỳ trong khoảng ngày: %Partition được thay bằng đuôi kỳ, %[ ... ]% được chèn điều kiện.</a:t>
-            </a:r>
-          </a:p>
-          <a:p>
-            <a:r>
-              <a:t>sysorder / sysprint / systotal là cột hệ thống của lưới báo cáo (5 = chi tiết, 1 = tổng...).</a:t>
-            </a:r>
-          </a:p>
-          <a:p>
-            <a:r>
-              <a:t>Khi ghép chuỗi giá trị người dùng nhập, luôn REPLACE dấu nháy đơn để tránh lỗi và SQL injection.</a:t>
-            </a:r>
-          </a:p>
-          <a:p>
-            <a:r>
-              <a:t>Ý nghĩa tham số suy từ khung mẫu — trước khi dùng hàm FastBusiness$ mới, F12 để xem code. Ví dụ đầy đủ trong tài liệu Word, mục 6.2.</a:t>
+              <a:t>Khung procedure báo cáo của Fast khá cố định. Bcode có sẵn khung này: gõ rsrepq trong SQL Query để chèn.</a:t>
+            </a:r>
+          </a:p>
+          <a:p>
+            <a:r>
+              <a:t>GetUnitFilter dựng điều kiện lọc đơn vị theo quyền của user đang đăng nhập.</a:t>
+            </a:r>
+          </a:p>
+          <a:p>
+            <a:r>
+              <a:t>SELECT TOP 0 ... INTO #report tạo bảng tạm có đúng kiểu cột.</a:t>
+            </a:r>
+          </a:p>
+          <a:p>
+            <a:r>
+              <a:t>@Key là chuỗi điều kiện lọc; GetCheckKey kiểm tra và chuẩn hoá chuỗi này trước khi chạy.</a:t>
+            </a:r>
+          </a:p>
+          <a:p>
+            <a:r>
+              <a:t>Partition$Execute chạy câu @q trên mọi bảng kỳ nằm trong khoảng ngày: %Partition được thay bằng đuôi của từng kỳ, chỗ %[ ... ]% được chèn chuỗi điều kiện.</a:t>
+            </a:r>
+          </a:p>
+          <a:p>
+            <a:r>
+              <a:t>sysorder / sysprint / systotal là các cột hệ thống của lưới báo cáo (ví dụ sysorder 5 là dòng chi tiết, 1 là dòng tổng...).</a:t>
+            </a:r>
+          </a:p>
+          <a:p>
+            <a:r>
+              <a:t>Khi ghép chuỗi có giá trị người dùng nhập, luôn REPLACE dấu nháy đơn để tránh lỗi cú pháp và tránh SQL injection.</a:t>
+            </a:r>
+          </a:p>
+          <a:p>
+            <a:r>
+              <a:t>Ý nghĩa các tham số ở đây được suy ra từ khung mẫu — trước khi dùng một hàm FastBusiness$ chưa quen, bấm F12 để xem code. Ví dụ đầy đủ có trong tài liệu Word, mục 6.2.</a:t>
             </a:r>
           </a:p>
         </p:txBody>
@@ -894,22 +894,22 @@
           <a:lstStyle/>
           <a:p>
             <a:r>
-              <a:t>Ba công cụ báo cáo, đều cần key bản quyền (trừ Write Schema).</a:t>
-            </a:r>
-          </a:p>
-          <a:p>
-            <a:r>
-              <a:t>Tạo báo cáo: từ procedure có sẵn — gõ tên, Nạp, Chạy store, chỉnh cột, rồi Lưu vào source (Bcode sinh Main / Filter / Grid / Report + mẫu Excel, có diff và sao lưu) và tạo Menu. Hoặc thiết kế từ bảng kiểu kéo thả.</a:t>
-            </a:r>
-          </a:p>
-          <a:p>
-            <a:r>
-              <a:t>Create RPT &amp; XML: trình 3 bước, dán SQL Statement (lấy từ Profiler của báo cáo) và Grid Controller, chọn field, thiết kế Excel hoặc Pivot Excel, Create.</a:t>
-            </a:r>
-          </a:p>
-          <a:p>
-            <a:r>
-              <a:t>Write Schema: khi sửa procedure báo cáo làm đổi cột, chạy procedure rồi Write Schema để ghi lại .xsd và cập nhật bảng trong file .rpt; cần Crystal Reports runtime 13 64-bit.</a:t>
+              <a:t>Ba công cụ báo cáo; đều cần key bản quyền, trừ Write Schema.</a:t>
+            </a:r>
+          </a:p>
+          <a:p>
+            <a:r>
+              <a:t>Tạo báo cáo: cách 1 là đi từ procedure có sẵn — gõ tên procedure, bấm Nạp, Chạy store, chỉnh các cột, rồi Lưu vào source (Bcode sinh Main / Filter / Grid / Report và mẫu Excel, có xem khác biệt và tự sao lưu) và tạo Menu. Cách 2 là thiết kế từ bảng theo kiểu kéo thả.</a:t>
+            </a:r>
+          </a:p>
+          <a:p>
+            <a:r>
+              <a:t>Create RPT &amp; XML: trình hướng dẫn 3 bước — dán SQL Statement (lấy từ Profiler khi chạy báo cáo) và Grid Controller, chọn field, thiết kế mẫu Excel hoặc Pivot Excel, rồi bấm Create.</a:t>
+            </a:r>
+          </a:p>
+          <a:p>
+            <a:r>
+              <a:t>Write Schema: khi sửa procedure báo cáo làm thay đổi các cột, chạy procedure rồi bấm Write Schema để ghi lại file .xsd và cập nhật bảng dữ liệu trong file .rpt; máy cần cài Crystal Reports runtime 13 64-bit.</a:t>
             </a:r>
           </a:p>
           <a:p>
@@ -919,7 +919,7 @@
           </a:p>
           <a:p>
             <a:r>
-              <a:t>Quy trình thêm báo cáo: viết &amp; thử procedure → Tạo báo cáo → lưu vào source + menu → thử trên web → đưa vào Note (New).</a:t>
+              <a:t>Quy trình thêm báo cáo: viết và chạy thử procedure → Tạo báo cáo → lưu vào source và tạo menu → thử trên web → đưa vào Note (New).</a:t>
             </a:r>
           </a:p>
         </p:txBody>
@@ -989,12 +989,12 @@
           <a:lstStyle/>
           <a:p>
             <a:r>
-              <a:t>Quy trình thêm báo cáo: viết và chạy thử procedure trên SQL Query với tham số mẫu (ngày đầu / cuối kỳ, đơn vị); mở Tạo báo cáo → Từ procedure có sẵn → Chạy store → chỉnh cột (tiêu đề v/e, độ rộng, định dạng, cộng tổng); Lưu vào source (Bcode sinh Main / Filter / Grid / Report + mẫu Excel, có diff và sao lưu); tạo Menu; chạy trên web và đóng gói vào Note (New).</a:t>
-            </a:r>
-          </a:p>
-          <a:p>
-            <a:r>
-              <a:t>Tìm procedure của báo cáo chuẩn: Ctrl+3 SQL Profiler, lọc theo user, bấm Nhận trên web, copy câu exec.</a:t>
+              <a:t>Quy trình thêm báo cáo: (1) viết và chạy thử procedure trên SQL Query với tham số mẫu (ngày đầu kỳ, ngày cuối kỳ, đơn vị); (2) mở Tạo báo cáo → Từ procedure có sẵn → Chạy store → chỉnh các cột (tiêu đề tiếng Việt / tiếng Anh, độ rộng, định dạng, cộng tổng); (3) Lưu vào source — Bcode sinh Main / Filter / Grid / Report và mẫu Excel, có xem khác biệt và tự sao lưu; (4) tạo Menu; (5) chạy thử trên web (lọc, xuất Excel, in) rồi đóng gói vào Note (New).</a:t>
+            </a:r>
+          </a:p>
+          <a:p>
+            <a:r>
+              <a:t>Muốn biết báo cáo chuẩn đang gọi procedure nào: bấm Ctrl+3 mở SQL Profiler, lọc theo user, bấm Nhận trên web, rồi copy câu exec.</a:t>
             </a:r>
           </a:p>
         </p:txBody>
@@ -1149,12 +1149,12 @@
           </a:p>
           <a:p>
             <a:r>
-              <a:t>2. Chỗ Partition$Execute thay đuôi bảng kỳ và chèn điều kiện cho từng kỳ.</a:t>
-            </a:r>
-          </a:p>
-          <a:p>
-            <a:r>
-              <a:t>3. App_Data\Controllers\Templates\Excel, Report gọi bằng templateFile.</a:t>
+              <a:t>2. Là chỗ để Partition$Execute thay bằng đuôi bảng của từng kỳ và chèn điều kiện cho kỳ đó.</a:t>
+            </a:r>
+          </a:p>
+          <a:p>
+            <a:r>
+              <a:t>3. Trong App_Data\Controllers\Templates\Excel; file Report gọi mẫu bằng templateFile.</a:t>
             </a:r>
           </a:p>
           <a:p>
@@ -6101,7 +6101,7 @@
                 <a:ea typeface="Segoe UI"/>
                 <a:cs typeface="Segoe UI"/>
               </a:rPr>
-              <a:t>App Data</a:t>
+              <a:t>ở App Data,</a:t>
             </a:r>
           </a:p>
           <a:p>
@@ -6455,7 +6455,7 @@
                 <a:ea typeface="Segoe UI"/>
                 <a:cs typeface="Segoe UI"/>
               </a:rPr>
-              <a:t>mẫu in / xuất</a:t>
+              <a:t>khai mẫu in, xuất</a:t>
             </a:r>
           </a:p>
         </p:txBody>
@@ -7115,7 +7115,7 @@
                 <a:ea typeface="Segoe UI"/>
                 <a:cs typeface="Segoe UI"/>
               </a:rPr>
-              <a:t>chép báo cáo cùng loại rồi sửa</a:t>
+              <a:t>chép một báo cáo cùng loại rồi sửa</a:t>
             </a:r>
             <a:r>
               <a:rPr sz="1400" b="0" i="0">
@@ -8336,7 +8336,7 @@
                 <a:ea typeface="Segoe UI"/>
                 <a:cs typeface="Segoe UI"/>
               </a:rPr>
-              <a:t> chèn khung</a:t>
+              <a:t> để chèn khung</a:t>
             </a:r>
           </a:p>
           <a:p>
@@ -8469,6 +8469,17 @@
               </a:rPr>
               <a:t>GetCheckKey</a:t>
             </a:r>
+            <a:r>
+              <a:rPr sz="1500" b="0" i="0">
+                <a:solidFill>
+                  <a:srgbClr val="263238"/>
+                </a:solidFill>
+                <a:latin typeface="Segoe UI"/>
+                <a:ea typeface="Segoe UI"/>
+                <a:cs typeface="Segoe UI"/>
+              </a:rPr>
+              <a:t> (điều kiện)</a:t>
+            </a:r>
           </a:p>
           <a:p>
             <a:pPr>
@@ -8507,7 +8518,7 @@
                 <a:ea typeface="Segoe UI"/>
                 <a:cs typeface="Segoe UI"/>
               </a:rPr>
-              <a:t> — chạy mọi kỳ</a:t>
+              <a:t> — chạy trên mọi kỳ</a:t>
             </a:r>
           </a:p>
           <a:p>
@@ -9283,7 +9294,7 @@
                 <a:ea typeface="Segoe UI"/>
                 <a:cs typeface="Segoe UI"/>
               </a:rPr>
-              <a:t>Chọn field → thiết kế Excel / Pivot</a:t>
+              <a:t>Chọn field → thiết kế Excel hoặc Pivot</a:t>
             </a:r>
           </a:p>
           <a:p>
@@ -9323,7 +9334,7 @@
                 <a:ea typeface="Segoe UI"/>
                 <a:cs typeface="Segoe UI"/>
               </a:rPr>
-              <a:t> → Đưa vào source (có diff)</a:t>
+              <a:t> → Đưa vào source (có xem khác biệt)</a:t>
             </a:r>
           </a:p>
           <a:p>
@@ -9363,7 +9374,7 @@
                 <a:ea typeface="Segoe UI"/>
                 <a:cs typeface="Segoe UI"/>
               </a:rPr>
-              <a:t> chuyển mẫu</a:t>
+              <a:t>: chuyển mẫu sang .frx</a:t>
             </a:r>
           </a:p>
         </p:txBody>
@@ -9544,7 +9555,7 @@
                 <a:ea typeface="Segoe UI"/>
                 <a:cs typeface="Segoe UI"/>
               </a:rPr>
-              <a:t>Sau khi đổi cột procedure</a:t>
+              <a:t>Dùng sau khi đổi cột của procedure</a:t>
             </a:r>
           </a:p>
           <a:p>
@@ -9573,7 +9584,7 @@
                 <a:ea typeface="Segoe UI"/>
                 <a:cs typeface="Segoe UI"/>
               </a:rPr>
-              <a:t>Ghi </a:t>
+              <a:t>Ghi file </a:t>
             </a:r>
             <a:r>
               <a:rPr sz="1500" b="0" i="0">
@@ -9664,7 +9675,7 @@
                 <a:ea typeface="Segoe UI"/>
                 <a:cs typeface="Segoe UI"/>
               </a:rPr>
-              <a:t>Bản cũ lưu </a:t>
+              <a:t>Bản cũ lưu thành </a:t>
             </a:r>
             <a:r>
               <a:rPr sz="1500" b="0" i="0">
@@ -9859,7 +9870,7 @@
                 <a:ea typeface="Segoe UI"/>
                 <a:cs typeface="Segoe UI"/>
               </a:rPr>
-              <a:t> (không ghi đuôi).</a:t>
+              <a:t> (không ghi đuôi file).</a:t>
             </a:r>
           </a:p>
         </p:txBody>
@@ -10204,7 +10215,7 @@
                 <a:ea typeface="Segoe UI"/>
                 <a:cs typeface="Segoe UI"/>
               </a:rPr>
-              <a:t>viết + chạy thử</a:t>
+              <a:t>viết và chạy thử</a:t>
             </a:r>
           </a:p>
           <a:p>
@@ -10735,7 +10746,7 @@
                 <a:ea typeface="Segoe UI"/>
                 <a:cs typeface="Segoe UI"/>
               </a:rPr>
-              <a:t>Menu… trong</a:t>
+              <a:t>nút Menu… trong</a:t>
             </a:r>
           </a:p>
           <a:p>
@@ -11073,7 +11084,7 @@
                 <a:ea typeface="Segoe UI"/>
                 <a:cs typeface="Segoe UI"/>
               </a:rPr>
-              <a:t>Đổi cột procedure mà báo cáo có mẫu </a:t>
+              <a:t>Đổi cột của procedure mà báo cáo có mẫu </a:t>
             </a:r>
             <a:r>
               <a:rPr sz="1700" b="0" i="0">
@@ -11095,7 +11106,7 @@
                 <a:ea typeface="Segoe UI"/>
                 <a:cs typeface="Segoe UI"/>
               </a:rPr>
-              <a:t> → </a:t>
+              <a:t> → chạy </a:t>
             </a:r>
             <a:r>
               <a:rPr sz="1800" b="1" i="0">
@@ -11467,7 +11478,7 @@
                 <a:ea typeface="Segoe UI"/>
                 <a:cs typeface="Segoe UI"/>
               </a:rPr>
-              <a:t> Dùng Tạo báo cáo sinh màn hình + menu, chạy trên web, xuất Excel.</a:t>
+              <a:t> Dùng Tạo báo cáo để sinh màn hình và menu, chạy trên web, xuất Excel.</a:t>
             </a:r>
           </a:p>
           <a:p>
@@ -11507,7 +11518,7 @@
                 <a:ea typeface="Segoe UI"/>
                 <a:cs typeface="Segoe UI"/>
               </a:rPr>
-              <a:t> Bật Profiler, chạy một báo cáo chuẩn, copy câu </a:t>
+              <a:t> Bật Profiler, chạy một báo cáo chuẩn, rồi copy câu </a:t>
             </a:r>
             <a:r>
               <a:rPr sz="1900" b="0" i="0">
